--- a/Theme5-CircularEconomy-EVBatteryHealthAdvisor-et-autotech-hackathon-2026.pptx
+++ b/Theme5-CircularEconomy-EVBatteryHealthAdvisor-et-autotech-hackathon-2026.pptx
@@ -8675,9 +8675,19 @@
                 <a:ea typeface="Figtree"/>
                 <a:cs typeface="Figtree"/>
                 <a:sym typeface="Figtree"/>
+                <a:hlinkClick r:id="rId3"/>
               </a:rPr>
               <a:t>https://colab.research.google.com/drive/102-ctlWFoPGHs7WK3aLANhji544rvL8a</a:t>
             </a:r>
+            <a:endParaRPr lang="en-US" dirty="0">
+              <a:solidFill>
+                <a:schemeClr val="bg1"/>
+              </a:solidFill>
+              <a:latin typeface="Figtree"/>
+              <a:ea typeface="Figtree"/>
+              <a:cs typeface="Figtree"/>
+              <a:sym typeface="Figtree"/>
+            </a:endParaRPr>
           </a:p>
           <a:p>
             <a:pPr marL="285750" indent="-285750">
@@ -8714,9 +8724,32 @@
                 <a:ea typeface="Figtree"/>
                 <a:cs typeface="Figtree"/>
                 <a:sym typeface="Figtree"/>
+                <a:hlinkClick r:id="rId4"/>
               </a:rPr>
-              <a:t>https://github.com/ashwini-sawardekar/EV-Battery-Health-Advisor</a:t>
+              <a:t>https://github.com/ashwini-sawardekar</a:t>
             </a:r>
+            <a:r>
+              <a:rPr lang="en-US">
+                <a:solidFill>
+                  <a:schemeClr val="bg1"/>
+                </a:solidFill>
+                <a:latin typeface="Figtree"/>
+                <a:ea typeface="Figtree"/>
+                <a:cs typeface="Figtree"/>
+                <a:sym typeface="Figtree"/>
+                <a:hlinkClick r:id="rId4"/>
+              </a:rPr>
+              <a:t>/EV-Battery-Health-Advisor</a:t>
+            </a:r>
+            <a:endParaRPr lang="en-US" dirty="0">
+              <a:solidFill>
+                <a:schemeClr val="bg1"/>
+              </a:solidFill>
+              <a:latin typeface="Figtree"/>
+              <a:ea typeface="Figtree"/>
+              <a:cs typeface="Figtree"/>
+              <a:sym typeface="Figtree"/>
+            </a:endParaRPr>
           </a:p>
           <a:p>
             <a:pPr marL="285750" indent="-285750">
@@ -8765,7 +8798,7 @@
                 <a:ea typeface="Figtree"/>
                 <a:cs typeface="Figtree"/>
                 <a:sym typeface="Figtree"/>
-                <a:hlinkClick r:id="rId3"/>
+                <a:hlinkClick r:id="rId5"/>
               </a:rPr>
               <a:t>https://ev-battery-health-advisor-gfvndb4ecqjjzgjwsjj7ck.streamlit.app/</a:t>
             </a:r>
@@ -8814,9 +8847,36 @@
                 <a:ea typeface="Figtree"/>
                 <a:cs typeface="Figtree"/>
                 <a:sym typeface="Figtree"/>
+                <a:hlinkClick r:id="rId6"/>
               </a:rPr>
-              <a:t>https://ev-battery-health-advisor-gfvndb4ecqjjzgjwsjj7ck.streamlit.app/</a:t>
+              <a:t>https://drive.google.com/file/d/1R-MD-VWaA4sO7YaQizRVXujux312xdMG/view?usp=drive_link</a:t>
             </a:r>
+            <a:endParaRPr lang="en-IN" dirty="0">
+              <a:solidFill>
+                <a:schemeClr val="bg1"/>
+              </a:solidFill>
+              <a:latin typeface="Figtree"/>
+              <a:ea typeface="Figtree"/>
+              <a:cs typeface="Figtree"/>
+              <a:sym typeface="Figtree"/>
+            </a:endParaRPr>
+          </a:p>
+          <a:p>
+            <a:pPr marL="457200" lvl="1" indent="0">
+              <a:spcAft>
+                <a:spcPts val="1200"/>
+              </a:spcAft>
+              <a:buNone/>
+            </a:pPr>
+            <a:endParaRPr lang="en-IN" dirty="0">
+              <a:solidFill>
+                <a:schemeClr val="bg1"/>
+              </a:solidFill>
+              <a:latin typeface="Figtree"/>
+              <a:ea typeface="Figtree"/>
+              <a:cs typeface="Figtree"/>
+              <a:sym typeface="Figtree"/>
+            </a:endParaRPr>
           </a:p>
         </p:txBody>
       </p:sp>
